--- a/templates/main_carousel.pptx
+++ b/templates/main_carousel.pptx
@@ -8,8 +8,10 @@
     <p:sldId id="256" r:id="rId7"/>
     <p:sldId id="257" r:id="rId8"/>
     <p:sldId id="258" r:id="rId9"/>
+    <p:sldId id="259" r:id="rId10"/>
+    <p:sldId id="260" r:id="rId11"/>
   </p:sldIdLst>
-  <p:sldSz cx="9144000" cy="6858000" type="screen4x3"/>
+  <p:sldSz cx="9144000" cy="9144000" type="screen4x3"/>
   <p:notesSz cx="6858000" cy="9144000"/>
   <p:defaultTextStyle>
     <a:defPPr>
@@ -3083,6 +3085,14 @@
 <file path=ppt/slides/slide1.xml><?xml version="1.0" encoding="utf-8"?>
 <p:sld xmlns:a="http://schemas.openxmlformats.org/drawingml/2006/main" xmlns:p="http://schemas.openxmlformats.org/presentationml/2006/main" xmlns:r="http://schemas.openxmlformats.org/officeDocument/2006/relationships">
   <p:cSld>
+    <p:bg>
+      <p:bgPr>
+        <a:solidFill>
+          <a:srgbClr val="14191E"/>
+        </a:solidFill>
+        <a:effectLst/>
+      </p:bgPr>
+    </p:bg>
     <p:spTree>
       <p:nvGrpSpPr>
         <p:cNvPr id="1" name=""/>
@@ -3092,42 +3102,185 @@
       <p:grpSpPr/>
       <p:sp>
         <p:nvSpPr>
-          <p:cNvPr id="2" name="Title 1"/>
-          <p:cNvSpPr>
-            <a:spLocks noGrp="1"/>
-          </p:cNvSpPr>
-          <p:nvPr>
-            <p:ph type="ctrTitle"/>
-          </p:nvPr>
-        </p:nvSpPr>
-        <p:spPr/>
-        <p:txBody>
-          <a:bodyPr/>
-          <a:lstStyle/>
-          <a:p>
-            <a:r>
-              <a:t>{{TITLE}}</a:t>
-            </a:r>
-          </a:p>
-        </p:txBody>
-      </p:sp>
-      <p:sp>
-        <p:nvSpPr>
-          <p:cNvPr id="3" name="Subtitle 2"/>
-          <p:cNvSpPr>
-            <a:spLocks noGrp="1"/>
-          </p:cNvSpPr>
-          <p:nvPr>
-            <p:ph type="subTitle" idx="1"/>
-          </p:nvPr>
-        </p:nvSpPr>
-        <p:spPr/>
-        <p:txBody>
-          <a:bodyPr/>
-          <a:lstStyle/>
-          <a:p>
-            <a:r>
-              <a:t>Swipe to learn more →</a:t>
+          <p:cNvPr id="2" name="TextBox 1"/>
+          <p:cNvSpPr txBox="1"/>
+          <p:nvPr/>
+        </p:nvSpPr>
+        <p:spPr>
+          <a:xfrm>
+            <a:off x="457200" y="8412480"/>
+            <a:ext cx="2743200" cy="457200"/>
+          </a:xfrm>
+          <a:prstGeom prst="rect">
+            <a:avLst/>
+          </a:prstGeom>
+          <a:noFill/>
+        </p:spPr>
+        <p:txBody>
+          <a:bodyPr wrap="none">
+            <a:spAutoFit/>
+          </a:bodyPr>
+          <a:lstStyle/>
+          <a:p>
+            <a:pPr>
+              <a:defRPr sz="1600">
+                <a:solidFill>
+                  <a:srgbClr val="AAAAAA"/>
+                </a:solidFill>
+              </a:defRPr>
+            </a:pPr>
+            <a:r>
+              <a:t>@DataScientistExplains</a:t>
+            </a:r>
+          </a:p>
+        </p:txBody>
+      </p:sp>
+      <p:sp>
+        <p:nvSpPr>
+          <p:cNvPr id="3" name="TextBox 2"/>
+          <p:cNvSpPr txBox="1"/>
+          <p:nvPr/>
+        </p:nvSpPr>
+        <p:spPr>
+          <a:xfrm>
+            <a:off x="7772400" y="8412480"/>
+            <a:ext cx="914400" cy="457200"/>
+          </a:xfrm>
+          <a:prstGeom prst="rect">
+            <a:avLst/>
+          </a:prstGeom>
+          <a:noFill/>
+        </p:spPr>
+        <p:txBody>
+          <a:bodyPr wrap="none">
+            <a:spAutoFit/>
+          </a:bodyPr>
+          <a:lstStyle/>
+          <a:p>
+            <a:pPr>
+              <a:defRPr sz="1600">
+                <a:solidFill>
+                  <a:srgbClr val="008080"/>
+                </a:solidFill>
+              </a:defRPr>
+            </a:pPr>
+            <a:r>
+              <a:t>1/5</a:t>
+            </a:r>
+          </a:p>
+        </p:txBody>
+      </p:sp>
+      <p:sp>
+        <p:nvSpPr>
+          <p:cNvPr id="4" name="Rectangle 3"/>
+          <p:cNvSpPr/>
+          <p:nvPr/>
+        </p:nvSpPr>
+        <p:spPr>
+          <a:xfrm>
+            <a:off x="457200" y="457200"/>
+            <a:ext cx="2743200" cy="91440"/>
+          </a:xfrm>
+          <a:prstGeom prst="rect">
+            <a:avLst/>
+          </a:prstGeom>
+          <a:solidFill>
+            <a:srgbClr val="FF7F50"/>
+          </a:solidFill>
+          <a:ln>
+            <a:solidFill>
+              <a:srgbClr val="FF7F50"/>
+            </a:solidFill>
+          </a:ln>
+        </p:spPr>
+        <p:style>
+          <a:lnRef idx="1">
+            <a:schemeClr val="accent1"/>
+          </a:lnRef>
+          <a:fillRef idx="3">
+            <a:schemeClr val="accent1"/>
+          </a:fillRef>
+          <a:effectRef idx="2">
+            <a:schemeClr val="accent1"/>
+          </a:effectRef>
+          <a:fontRef idx="minor">
+            <a:schemeClr val="lt1"/>
+          </a:fontRef>
+        </p:style>
+        <p:txBody>
+          <a:bodyPr rtlCol="0" anchor="ctr"/>
+          <a:lstStyle/>
+          <a:p>
+            <a:pPr algn="ctr"/>
+          </a:p>
+        </p:txBody>
+      </p:sp>
+      <p:sp>
+        <p:nvSpPr>
+          <p:cNvPr id="5" name="TextBox 4"/>
+          <p:cNvSpPr txBox="1"/>
+          <p:nvPr/>
+        </p:nvSpPr>
+        <p:spPr>
+          <a:xfrm>
+            <a:off x="457200" y="1828800"/>
+            <a:ext cx="8229600" cy="3657600"/>
+          </a:xfrm>
+          <a:prstGeom prst="rect">
+            <a:avLst/>
+          </a:prstGeom>
+          <a:noFill/>
+        </p:spPr>
+        <p:txBody>
+          <a:bodyPr wrap="square">
+            <a:spAutoFit/>
+          </a:bodyPr>
+          <a:lstStyle/>
+          <a:p>
+            <a:pPr>
+              <a:defRPr sz="6400" b="1">
+                <a:solidFill>
+                  <a:srgbClr val="F0F0F0"/>
+                </a:solidFill>
+              </a:defRPr>
+            </a:pPr>
+            <a:r>
+              <a:t>{{HOOK_TITLE}}</a:t>
+            </a:r>
+          </a:p>
+        </p:txBody>
+      </p:sp>
+      <p:sp>
+        <p:nvSpPr>
+          <p:cNvPr id="6" name="TextBox 5"/>
+          <p:cNvSpPr txBox="1"/>
+          <p:nvPr/>
+        </p:nvSpPr>
+        <p:spPr>
+          <a:xfrm>
+            <a:off x="457200" y="5486400"/>
+            <a:ext cx="8229600" cy="1371600"/>
+          </a:xfrm>
+          <a:prstGeom prst="rect">
+            <a:avLst/>
+          </a:prstGeom>
+          <a:noFill/>
+        </p:spPr>
+        <p:txBody>
+          <a:bodyPr wrap="square">
+            <a:spAutoFit/>
+          </a:bodyPr>
+          <a:lstStyle/>
+          <a:p>
+            <a:pPr>
+              <a:defRPr sz="3200">
+                <a:solidFill>
+                  <a:srgbClr val="008080"/>
+                </a:solidFill>
+              </a:defRPr>
+            </a:pPr>
+            <a:r>
+              <a:t>{{HOOK_SUB}}</a:t>
             </a:r>
           </a:p>
         </p:txBody>
@@ -3143,6 +3296,14 @@
 <file path=ppt/slides/slide2.xml><?xml version="1.0" encoding="utf-8"?>
 <p:sld xmlns:a="http://schemas.openxmlformats.org/drawingml/2006/main" xmlns:p="http://schemas.openxmlformats.org/presentationml/2006/main" xmlns:r="http://schemas.openxmlformats.org/officeDocument/2006/relationships">
   <p:cSld>
+    <p:bg>
+      <p:bgPr>
+        <a:solidFill>
+          <a:srgbClr val="14191E"/>
+        </a:solidFill>
+        <a:effectLst/>
+      </p:bgPr>
+    </p:bg>
     <p:spTree>
       <p:nvGrpSpPr>
         <p:cNvPr id="1" name=""/>
@@ -3152,42 +3313,175 @@
       <p:grpSpPr/>
       <p:sp>
         <p:nvSpPr>
-          <p:cNvPr id="2" name="Title 1"/>
-          <p:cNvSpPr>
-            <a:spLocks noGrp="1"/>
-          </p:cNvSpPr>
-          <p:nvPr>
-            <p:ph type="title"/>
-          </p:nvPr>
-        </p:nvSpPr>
-        <p:spPr/>
-        <p:txBody>
-          <a:bodyPr/>
-          <a:lstStyle/>
-          <a:p>
-            <a:r>
-              <a:t>The Concept</a:t>
-            </a:r>
-          </a:p>
-        </p:txBody>
-      </p:sp>
-      <p:sp>
-        <p:nvSpPr>
-          <p:cNvPr id="3" name="Content Placeholder 2"/>
-          <p:cNvSpPr>
-            <a:spLocks noGrp="1"/>
-          </p:cNvSpPr>
-          <p:nvPr>
-            <p:ph idx="1"/>
-          </p:nvPr>
-        </p:nvSpPr>
-        <p:spPr/>
-        <p:txBody>
-          <a:bodyPr/>
-          <a:lstStyle/>
-          <a:p>
-            <a:r>
-              <a:t>{{BODY}}</a:t>
+          <p:cNvPr id="2" name="TextBox 1"/>
+          <p:cNvSpPr txBox="1"/>
+          <p:nvPr/>
+        </p:nvSpPr>
+        <p:spPr>
+          <a:xfrm>
+            <a:off x="457200" y="8412480"/>
+            <a:ext cx="2743200" cy="457200"/>
+          </a:xfrm>
+          <a:prstGeom prst="rect">
+            <a:avLst/>
+          </a:prstGeom>
+          <a:noFill/>
+        </p:spPr>
+        <p:txBody>
+          <a:bodyPr wrap="none">
+            <a:spAutoFit/>
+          </a:bodyPr>
+          <a:lstStyle/>
+          <a:p>
+            <a:pPr>
+              <a:defRPr sz="1600">
+                <a:solidFill>
+                  <a:srgbClr val="AAAAAA"/>
+                </a:solidFill>
+              </a:defRPr>
+            </a:pPr>
+            <a:r>
+              <a:t>@DataScientistExplains</a:t>
+            </a:r>
+          </a:p>
+        </p:txBody>
+      </p:sp>
+      <p:sp>
+        <p:nvSpPr>
+          <p:cNvPr id="3" name="TextBox 2"/>
+          <p:cNvSpPr txBox="1"/>
+          <p:nvPr/>
+        </p:nvSpPr>
+        <p:spPr>
+          <a:xfrm>
+            <a:off x="7772400" y="8412480"/>
+            <a:ext cx="914400" cy="457200"/>
+          </a:xfrm>
+          <a:prstGeom prst="rect">
+            <a:avLst/>
+          </a:prstGeom>
+          <a:noFill/>
+        </p:spPr>
+        <p:txBody>
+          <a:bodyPr wrap="none">
+            <a:spAutoFit/>
+          </a:bodyPr>
+          <a:lstStyle/>
+          <a:p>
+            <a:pPr>
+              <a:defRPr sz="1600">
+                <a:solidFill>
+                  <a:srgbClr val="008080"/>
+                </a:solidFill>
+              </a:defRPr>
+            </a:pPr>
+            <a:r>
+              <a:t>2/5</a:t>
+            </a:r>
+          </a:p>
+        </p:txBody>
+      </p:sp>
+      <p:sp>
+        <p:nvSpPr>
+          <p:cNvPr id="4" name="TextBox 3"/>
+          <p:cNvSpPr txBox="1"/>
+          <p:nvPr/>
+        </p:nvSpPr>
+        <p:spPr>
+          <a:xfrm>
+            <a:off x="457200" y="457200"/>
+            <a:ext cx="3657600" cy="457200"/>
+          </a:xfrm>
+          <a:prstGeom prst="rect">
+            <a:avLst/>
+          </a:prstGeom>
+          <a:noFill/>
+        </p:spPr>
+        <p:txBody>
+          <a:bodyPr wrap="none">
+            <a:spAutoFit/>
+          </a:bodyPr>
+          <a:lstStyle/>
+          <a:p>
+            <a:pPr>
+              <a:defRPr sz="1400" b="1">
+                <a:solidFill>
+                  <a:srgbClr val="FF7F50"/>
+                </a:solidFill>
+              </a:defRPr>
+            </a:pPr>
+            <a:r>
+              <a:t>HARD-WON LESSONS</a:t>
+            </a:r>
+          </a:p>
+        </p:txBody>
+      </p:sp>
+      <p:sp>
+        <p:nvSpPr>
+          <p:cNvPr id="5" name="TextBox 4"/>
+          <p:cNvSpPr txBox="1"/>
+          <p:nvPr/>
+        </p:nvSpPr>
+        <p:spPr>
+          <a:xfrm>
+            <a:off x="457200" y="1371600"/>
+            <a:ext cx="8229600" cy="1371600"/>
+          </a:xfrm>
+          <a:prstGeom prst="rect">
+            <a:avLst/>
+          </a:prstGeom>
+          <a:noFill/>
+        </p:spPr>
+        <p:txBody>
+          <a:bodyPr wrap="none">
+            <a:spAutoFit/>
+          </a:bodyPr>
+          <a:lstStyle/>
+          <a:p>
+            <a:pPr>
+              <a:defRPr sz="4400" b="1">
+                <a:solidFill>
+                  <a:srgbClr val="F0F0F0"/>
+                </a:solidFill>
+              </a:defRPr>
+            </a:pPr>
+            <a:r>
+              <a:t>{{BODY_1_TITLE}}</a:t>
+            </a:r>
+          </a:p>
+        </p:txBody>
+      </p:sp>
+      <p:sp>
+        <p:nvSpPr>
+          <p:cNvPr id="6" name="TextBox 5"/>
+          <p:cNvSpPr txBox="1"/>
+          <p:nvPr/>
+        </p:nvSpPr>
+        <p:spPr>
+          <a:xfrm>
+            <a:off x="457200" y="3200400"/>
+            <a:ext cx="8229600" cy="4572000"/>
+          </a:xfrm>
+          <a:prstGeom prst="rect">
+            <a:avLst/>
+          </a:prstGeom>
+          <a:noFill/>
+        </p:spPr>
+        <p:txBody>
+          <a:bodyPr wrap="square">
+            <a:spAutoFit/>
+          </a:bodyPr>
+          <a:lstStyle/>
+          <a:p>
+            <a:pPr>
+              <a:defRPr sz="2800">
+                <a:solidFill>
+                  <a:srgbClr val="AAAAAA"/>
+                </a:solidFill>
+              </a:defRPr>
+            </a:pPr>
+            <a:r>
+              <a:t>{{BODY_1_TEXT}}</a:t>
             </a:r>
           </a:p>
         </p:txBody>
@@ -3203,6 +3497,14 @@
 <file path=ppt/slides/slide3.xml><?xml version="1.0" encoding="utf-8"?>
 <p:sld xmlns:a="http://schemas.openxmlformats.org/drawingml/2006/main" xmlns:p="http://schemas.openxmlformats.org/presentationml/2006/main" xmlns:r="http://schemas.openxmlformats.org/officeDocument/2006/relationships">
   <p:cSld>
+    <p:bg>
+      <p:bgPr>
+        <a:solidFill>
+          <a:srgbClr val="14191E"/>
+        </a:solidFill>
+        <a:effectLst/>
+      </p:bgPr>
+    </p:bg>
     <p:spTree>
       <p:nvGrpSpPr>
         <p:cNvPr id="1" name=""/>
@@ -3212,42 +3514,587 @@
       <p:grpSpPr/>
       <p:sp>
         <p:nvSpPr>
-          <p:cNvPr id="2" name="Title 1"/>
-          <p:cNvSpPr>
-            <a:spLocks noGrp="1"/>
-          </p:cNvSpPr>
-          <p:nvPr>
-            <p:ph type="title"/>
-          </p:nvPr>
-        </p:nvSpPr>
-        <p:spPr/>
-        <p:txBody>
-          <a:bodyPr/>
-          <a:lstStyle/>
-          <a:p>
-            <a:r>
-              <a:t>Call to Action</a:t>
-            </a:r>
-          </a:p>
-        </p:txBody>
-      </p:sp>
-      <p:sp>
-        <p:nvSpPr>
-          <p:cNvPr id="3" name="Content Placeholder 2"/>
-          <p:cNvSpPr>
-            <a:spLocks noGrp="1"/>
-          </p:cNvSpPr>
-          <p:nvPr>
-            <p:ph idx="1"/>
-          </p:nvPr>
-        </p:nvSpPr>
-        <p:spPr/>
-        <p:txBody>
-          <a:bodyPr/>
-          <a:lstStyle/>
-          <a:p>
-            <a:r>
-              <a:t>{{ACTION}}</a:t>
+          <p:cNvPr id="2" name="TextBox 1"/>
+          <p:cNvSpPr txBox="1"/>
+          <p:nvPr/>
+        </p:nvSpPr>
+        <p:spPr>
+          <a:xfrm>
+            <a:off x="457200" y="8412480"/>
+            <a:ext cx="2743200" cy="457200"/>
+          </a:xfrm>
+          <a:prstGeom prst="rect">
+            <a:avLst/>
+          </a:prstGeom>
+          <a:noFill/>
+        </p:spPr>
+        <p:txBody>
+          <a:bodyPr wrap="none">
+            <a:spAutoFit/>
+          </a:bodyPr>
+          <a:lstStyle/>
+          <a:p>
+            <a:pPr>
+              <a:defRPr sz="1600">
+                <a:solidFill>
+                  <a:srgbClr val="AAAAAA"/>
+                </a:solidFill>
+              </a:defRPr>
+            </a:pPr>
+            <a:r>
+              <a:t>@DataScientistExplains</a:t>
+            </a:r>
+          </a:p>
+        </p:txBody>
+      </p:sp>
+      <p:sp>
+        <p:nvSpPr>
+          <p:cNvPr id="3" name="TextBox 2"/>
+          <p:cNvSpPr txBox="1"/>
+          <p:nvPr/>
+        </p:nvSpPr>
+        <p:spPr>
+          <a:xfrm>
+            <a:off x="7772400" y="8412480"/>
+            <a:ext cx="914400" cy="457200"/>
+          </a:xfrm>
+          <a:prstGeom prst="rect">
+            <a:avLst/>
+          </a:prstGeom>
+          <a:noFill/>
+        </p:spPr>
+        <p:txBody>
+          <a:bodyPr wrap="none">
+            <a:spAutoFit/>
+          </a:bodyPr>
+          <a:lstStyle/>
+          <a:p>
+            <a:pPr>
+              <a:defRPr sz="1600">
+                <a:solidFill>
+                  <a:srgbClr val="008080"/>
+                </a:solidFill>
+              </a:defRPr>
+            </a:pPr>
+            <a:r>
+              <a:t>3/5</a:t>
+            </a:r>
+          </a:p>
+        </p:txBody>
+      </p:sp>
+      <p:sp>
+        <p:nvSpPr>
+          <p:cNvPr id="4" name="TextBox 3"/>
+          <p:cNvSpPr txBox="1"/>
+          <p:nvPr/>
+        </p:nvSpPr>
+        <p:spPr>
+          <a:xfrm>
+            <a:off x="457200" y="457200"/>
+            <a:ext cx="3657600" cy="457200"/>
+          </a:xfrm>
+          <a:prstGeom prst="rect">
+            <a:avLst/>
+          </a:prstGeom>
+          <a:noFill/>
+        </p:spPr>
+        <p:txBody>
+          <a:bodyPr wrap="none">
+            <a:spAutoFit/>
+          </a:bodyPr>
+          <a:lstStyle/>
+          <a:p>
+            <a:pPr>
+              <a:defRPr sz="1400" b="1">
+                <a:solidFill>
+                  <a:srgbClr val="FF7F50"/>
+                </a:solidFill>
+              </a:defRPr>
+            </a:pPr>
+            <a:r>
+              <a:t>HARD-WON LESSONS</a:t>
+            </a:r>
+          </a:p>
+        </p:txBody>
+      </p:sp>
+      <p:sp>
+        <p:nvSpPr>
+          <p:cNvPr id="5" name="TextBox 4"/>
+          <p:cNvSpPr txBox="1"/>
+          <p:nvPr/>
+        </p:nvSpPr>
+        <p:spPr>
+          <a:xfrm>
+            <a:off x="457200" y="1371600"/>
+            <a:ext cx="8229600" cy="1371600"/>
+          </a:xfrm>
+          <a:prstGeom prst="rect">
+            <a:avLst/>
+          </a:prstGeom>
+          <a:noFill/>
+        </p:spPr>
+        <p:txBody>
+          <a:bodyPr wrap="none">
+            <a:spAutoFit/>
+          </a:bodyPr>
+          <a:lstStyle/>
+          <a:p>
+            <a:pPr>
+              <a:defRPr sz="4400" b="1">
+                <a:solidFill>
+                  <a:srgbClr val="F0F0F0"/>
+                </a:solidFill>
+              </a:defRPr>
+            </a:pPr>
+            <a:r>
+              <a:t>{{BODY_2_TITLE}}</a:t>
+            </a:r>
+          </a:p>
+        </p:txBody>
+      </p:sp>
+      <p:sp>
+        <p:nvSpPr>
+          <p:cNvPr id="6" name="TextBox 5"/>
+          <p:cNvSpPr txBox="1"/>
+          <p:nvPr/>
+        </p:nvSpPr>
+        <p:spPr>
+          <a:xfrm>
+            <a:off x="457200" y="3200400"/>
+            <a:ext cx="8229600" cy="4572000"/>
+          </a:xfrm>
+          <a:prstGeom prst="rect">
+            <a:avLst/>
+          </a:prstGeom>
+          <a:noFill/>
+        </p:spPr>
+        <p:txBody>
+          <a:bodyPr wrap="square">
+            <a:spAutoFit/>
+          </a:bodyPr>
+          <a:lstStyle/>
+          <a:p>
+            <a:pPr>
+              <a:defRPr sz="2800">
+                <a:solidFill>
+                  <a:srgbClr val="AAAAAA"/>
+                </a:solidFill>
+              </a:defRPr>
+            </a:pPr>
+            <a:r>
+              <a:t>{{BODY_2_TEXT}}</a:t>
+            </a:r>
+          </a:p>
+        </p:txBody>
+      </p:sp>
+    </p:spTree>
+  </p:cSld>
+  <p:clrMapOvr>
+    <a:masterClrMapping/>
+  </p:clrMapOvr>
+</p:sld>
+</file>
+
+<file path=ppt/slides/slide4.xml><?xml version="1.0" encoding="utf-8"?>
+<p:sld xmlns:a="http://schemas.openxmlformats.org/drawingml/2006/main" xmlns:p="http://schemas.openxmlformats.org/presentationml/2006/main" xmlns:r="http://schemas.openxmlformats.org/officeDocument/2006/relationships">
+  <p:cSld>
+    <p:bg>
+      <p:bgPr>
+        <a:solidFill>
+          <a:srgbClr val="14191E"/>
+        </a:solidFill>
+        <a:effectLst/>
+      </p:bgPr>
+    </p:bg>
+    <p:spTree>
+      <p:nvGrpSpPr>
+        <p:cNvPr id="1" name=""/>
+        <p:cNvGrpSpPr/>
+        <p:nvPr/>
+      </p:nvGrpSpPr>
+      <p:grpSpPr/>
+      <p:sp>
+        <p:nvSpPr>
+          <p:cNvPr id="2" name="TextBox 1"/>
+          <p:cNvSpPr txBox="1"/>
+          <p:nvPr/>
+        </p:nvSpPr>
+        <p:spPr>
+          <a:xfrm>
+            <a:off x="457200" y="8412480"/>
+            <a:ext cx="2743200" cy="457200"/>
+          </a:xfrm>
+          <a:prstGeom prst="rect">
+            <a:avLst/>
+          </a:prstGeom>
+          <a:noFill/>
+        </p:spPr>
+        <p:txBody>
+          <a:bodyPr wrap="none">
+            <a:spAutoFit/>
+          </a:bodyPr>
+          <a:lstStyle/>
+          <a:p>
+            <a:pPr>
+              <a:defRPr sz="1600">
+                <a:solidFill>
+                  <a:srgbClr val="AAAAAA"/>
+                </a:solidFill>
+              </a:defRPr>
+            </a:pPr>
+            <a:r>
+              <a:t>@DataScientistExplains</a:t>
+            </a:r>
+          </a:p>
+        </p:txBody>
+      </p:sp>
+      <p:sp>
+        <p:nvSpPr>
+          <p:cNvPr id="3" name="TextBox 2"/>
+          <p:cNvSpPr txBox="1"/>
+          <p:nvPr/>
+        </p:nvSpPr>
+        <p:spPr>
+          <a:xfrm>
+            <a:off x="7772400" y="8412480"/>
+            <a:ext cx="914400" cy="457200"/>
+          </a:xfrm>
+          <a:prstGeom prst="rect">
+            <a:avLst/>
+          </a:prstGeom>
+          <a:noFill/>
+        </p:spPr>
+        <p:txBody>
+          <a:bodyPr wrap="none">
+            <a:spAutoFit/>
+          </a:bodyPr>
+          <a:lstStyle/>
+          <a:p>
+            <a:pPr>
+              <a:defRPr sz="1600">
+                <a:solidFill>
+                  <a:srgbClr val="008080"/>
+                </a:solidFill>
+              </a:defRPr>
+            </a:pPr>
+            <a:r>
+              <a:t>4/5</a:t>
+            </a:r>
+          </a:p>
+        </p:txBody>
+      </p:sp>
+      <p:sp>
+        <p:nvSpPr>
+          <p:cNvPr id="4" name="TextBox 3"/>
+          <p:cNvSpPr txBox="1"/>
+          <p:nvPr/>
+        </p:nvSpPr>
+        <p:spPr>
+          <a:xfrm>
+            <a:off x="457200" y="457200"/>
+            <a:ext cx="3657600" cy="457200"/>
+          </a:xfrm>
+          <a:prstGeom prst="rect">
+            <a:avLst/>
+          </a:prstGeom>
+          <a:noFill/>
+        </p:spPr>
+        <p:txBody>
+          <a:bodyPr wrap="none">
+            <a:spAutoFit/>
+          </a:bodyPr>
+          <a:lstStyle/>
+          <a:p>
+            <a:pPr>
+              <a:defRPr sz="1400" b="1">
+                <a:solidFill>
+                  <a:srgbClr val="FF7F50"/>
+                </a:solidFill>
+              </a:defRPr>
+            </a:pPr>
+            <a:r>
+              <a:t>HARD-WON LESSONS</a:t>
+            </a:r>
+          </a:p>
+        </p:txBody>
+      </p:sp>
+      <p:sp>
+        <p:nvSpPr>
+          <p:cNvPr id="5" name="TextBox 4"/>
+          <p:cNvSpPr txBox="1"/>
+          <p:nvPr/>
+        </p:nvSpPr>
+        <p:spPr>
+          <a:xfrm>
+            <a:off x="457200" y="1371600"/>
+            <a:ext cx="8229600" cy="1371600"/>
+          </a:xfrm>
+          <a:prstGeom prst="rect">
+            <a:avLst/>
+          </a:prstGeom>
+          <a:noFill/>
+        </p:spPr>
+        <p:txBody>
+          <a:bodyPr wrap="none">
+            <a:spAutoFit/>
+          </a:bodyPr>
+          <a:lstStyle/>
+          <a:p>
+            <a:pPr>
+              <a:defRPr sz="4400" b="1">
+                <a:solidFill>
+                  <a:srgbClr val="F0F0F0"/>
+                </a:solidFill>
+              </a:defRPr>
+            </a:pPr>
+            <a:r>
+              <a:t>{{BODY_3_TITLE}}</a:t>
+            </a:r>
+          </a:p>
+        </p:txBody>
+      </p:sp>
+      <p:sp>
+        <p:nvSpPr>
+          <p:cNvPr id="6" name="TextBox 5"/>
+          <p:cNvSpPr txBox="1"/>
+          <p:nvPr/>
+        </p:nvSpPr>
+        <p:spPr>
+          <a:xfrm>
+            <a:off x="457200" y="3200400"/>
+            <a:ext cx="8229600" cy="4572000"/>
+          </a:xfrm>
+          <a:prstGeom prst="rect">
+            <a:avLst/>
+          </a:prstGeom>
+          <a:noFill/>
+        </p:spPr>
+        <p:txBody>
+          <a:bodyPr wrap="square">
+            <a:spAutoFit/>
+          </a:bodyPr>
+          <a:lstStyle/>
+          <a:p>
+            <a:pPr>
+              <a:defRPr sz="2800">
+                <a:solidFill>
+                  <a:srgbClr val="AAAAAA"/>
+                </a:solidFill>
+              </a:defRPr>
+            </a:pPr>
+            <a:r>
+              <a:t>{{BODY_3_TEXT}}</a:t>
+            </a:r>
+          </a:p>
+        </p:txBody>
+      </p:sp>
+    </p:spTree>
+  </p:cSld>
+  <p:clrMapOvr>
+    <a:masterClrMapping/>
+  </p:clrMapOvr>
+</p:sld>
+</file>
+
+<file path=ppt/slides/slide5.xml><?xml version="1.0" encoding="utf-8"?>
+<p:sld xmlns:a="http://schemas.openxmlformats.org/drawingml/2006/main" xmlns:p="http://schemas.openxmlformats.org/presentationml/2006/main" xmlns:r="http://schemas.openxmlformats.org/officeDocument/2006/relationships">
+  <p:cSld>
+    <p:bg>
+      <p:bgPr>
+        <a:solidFill>
+          <a:srgbClr val="14191E"/>
+        </a:solidFill>
+        <a:effectLst/>
+      </p:bgPr>
+    </p:bg>
+    <p:spTree>
+      <p:nvGrpSpPr>
+        <p:cNvPr id="1" name=""/>
+        <p:cNvGrpSpPr/>
+        <p:nvPr/>
+      </p:nvGrpSpPr>
+      <p:grpSpPr/>
+      <p:sp>
+        <p:nvSpPr>
+          <p:cNvPr id="2" name="TextBox 1"/>
+          <p:cNvSpPr txBox="1"/>
+          <p:nvPr/>
+        </p:nvSpPr>
+        <p:spPr>
+          <a:xfrm>
+            <a:off x="457200" y="8412480"/>
+            <a:ext cx="2743200" cy="457200"/>
+          </a:xfrm>
+          <a:prstGeom prst="rect">
+            <a:avLst/>
+          </a:prstGeom>
+          <a:noFill/>
+        </p:spPr>
+        <p:txBody>
+          <a:bodyPr wrap="none">
+            <a:spAutoFit/>
+          </a:bodyPr>
+          <a:lstStyle/>
+          <a:p>
+            <a:pPr>
+              <a:defRPr sz="1600">
+                <a:solidFill>
+                  <a:srgbClr val="AAAAAA"/>
+                </a:solidFill>
+              </a:defRPr>
+            </a:pPr>
+            <a:r>
+              <a:t>@DataScientistExplains</a:t>
+            </a:r>
+          </a:p>
+        </p:txBody>
+      </p:sp>
+      <p:sp>
+        <p:nvSpPr>
+          <p:cNvPr id="3" name="TextBox 2"/>
+          <p:cNvSpPr txBox="1"/>
+          <p:nvPr/>
+        </p:nvSpPr>
+        <p:spPr>
+          <a:xfrm>
+            <a:off x="7772400" y="8412480"/>
+            <a:ext cx="914400" cy="457200"/>
+          </a:xfrm>
+          <a:prstGeom prst="rect">
+            <a:avLst/>
+          </a:prstGeom>
+          <a:noFill/>
+        </p:spPr>
+        <p:txBody>
+          <a:bodyPr wrap="none">
+            <a:spAutoFit/>
+          </a:bodyPr>
+          <a:lstStyle/>
+          <a:p>
+            <a:pPr>
+              <a:defRPr sz="1600">
+                <a:solidFill>
+                  <a:srgbClr val="008080"/>
+                </a:solidFill>
+              </a:defRPr>
+            </a:pPr>
+            <a:r>
+              <a:t>5/5</a:t>
+            </a:r>
+          </a:p>
+        </p:txBody>
+      </p:sp>
+      <p:sp>
+        <p:nvSpPr>
+          <p:cNvPr id="4" name="Rectangle 3"/>
+          <p:cNvSpPr/>
+          <p:nvPr/>
+        </p:nvSpPr>
+        <p:spPr>
+          <a:xfrm>
+            <a:off x="457200" y="457200"/>
+            <a:ext cx="2743200" cy="91440"/>
+          </a:xfrm>
+          <a:prstGeom prst="rect">
+            <a:avLst/>
+          </a:prstGeom>
+          <a:solidFill>
+            <a:srgbClr val="008080"/>
+          </a:solidFill>
+          <a:ln>
+            <a:solidFill>
+              <a:srgbClr val="008080"/>
+            </a:solidFill>
+          </a:ln>
+        </p:spPr>
+        <p:style>
+          <a:lnRef idx="1">
+            <a:schemeClr val="accent1"/>
+          </a:lnRef>
+          <a:fillRef idx="3">
+            <a:schemeClr val="accent1"/>
+          </a:fillRef>
+          <a:effectRef idx="2">
+            <a:schemeClr val="accent1"/>
+          </a:effectRef>
+          <a:fontRef idx="minor">
+            <a:schemeClr val="lt1"/>
+          </a:fontRef>
+        </p:style>
+        <p:txBody>
+          <a:bodyPr rtlCol="0" anchor="ctr"/>
+          <a:lstStyle/>
+          <a:p>
+            <a:pPr algn="ctr"/>
+          </a:p>
+        </p:txBody>
+      </p:sp>
+      <p:sp>
+        <p:nvSpPr>
+          <p:cNvPr id="5" name="TextBox 4"/>
+          <p:cNvSpPr txBox="1"/>
+          <p:nvPr/>
+        </p:nvSpPr>
+        <p:spPr>
+          <a:xfrm>
+            <a:off x="457200" y="1828800"/>
+            <a:ext cx="8229600" cy="1828800"/>
+          </a:xfrm>
+          <a:prstGeom prst="rect">
+            <a:avLst/>
+          </a:prstGeom>
+          <a:noFill/>
+        </p:spPr>
+        <p:txBody>
+          <a:bodyPr wrap="none">
+            <a:spAutoFit/>
+          </a:bodyPr>
+          <a:lstStyle/>
+          <a:p>
+            <a:pPr>
+              <a:defRPr sz="5400" b="1">
+                <a:solidFill>
+                  <a:srgbClr val="F0F0F0"/>
+                </a:solidFill>
+              </a:defRPr>
+            </a:pPr>
+            <a:r>
+              <a:t>{{CTA_TITLE}}</a:t>
+            </a:r>
+          </a:p>
+        </p:txBody>
+      </p:sp>
+      <p:sp>
+        <p:nvSpPr>
+          <p:cNvPr id="6" name="TextBox 5"/>
+          <p:cNvSpPr txBox="1"/>
+          <p:nvPr/>
+        </p:nvSpPr>
+        <p:spPr>
+          <a:xfrm>
+            <a:off x="457200" y="4114800"/>
+            <a:ext cx="8229600" cy="2743200"/>
+          </a:xfrm>
+          <a:prstGeom prst="rect">
+            <a:avLst/>
+          </a:prstGeom>
+          <a:noFill/>
+        </p:spPr>
+        <p:txBody>
+          <a:bodyPr wrap="none">
+            <a:spAutoFit/>
+          </a:bodyPr>
+          <a:lstStyle/>
+          <a:p>
+            <a:pPr>
+              <a:defRPr sz="3200">
+                <a:solidFill>
+                  <a:srgbClr val="AAAAAA"/>
+                </a:solidFill>
+              </a:defRPr>
+            </a:pPr>
+            <a:r>
+              <a:t>{{CTA_TEXT}}</a:t>
             </a:r>
           </a:p>
         </p:txBody>
